--- a/trabalho_analise_dados/slides_video.pptx
+++ b/trabalho_analise_dados/slides_video.pptx
@@ -4783,7 +4783,7 @@
                 </a:solidFill>
                 <a:latin typeface="Calibri"/>
               </a:rPr>
-              <a:t>• Variáveis de segmentação (antiguidade, visitas, satisfação…) não existem à entrada: novo cliente cai quase sempre no Cluster 2</a:t>
+              <a:t>• Variáveis de segmentação (antiguidade, visitas, satisfação…) não existem à entrada: novo cliente tenderia a parecer-se com o Cluster 2 só por ser recente</a:t>
             </a:r>
           </a:p>
         </p:txBody>
